--- a/crypto_10_misc.pptx
+++ b/crypto_10_misc.pptx
@@ -10,12 +10,12 @@
   <p:sldIdLst>
     <p:sldId id="271" r:id="rId2"/>
     <p:sldId id="296" r:id="rId3"/>
-    <p:sldId id="306" r:id="rId4"/>
-    <p:sldId id="307" r:id="rId5"/>
-    <p:sldId id="270" r:id="rId6"/>
-    <p:sldId id="257" r:id="rId7"/>
-    <p:sldId id="260" r:id="rId8"/>
-    <p:sldId id="308" r:id="rId9"/>
+    <p:sldId id="307" r:id="rId4"/>
+    <p:sldId id="270" r:id="rId5"/>
+    <p:sldId id="257" r:id="rId6"/>
+    <p:sldId id="260" r:id="rId7"/>
+    <p:sldId id="308" r:id="rId8"/>
+    <p:sldId id="309" r:id="rId9"/>
     <p:sldId id="280" r:id="rId10"/>
     <p:sldId id="303" r:id="rId11"/>
   </p:sldIdLst>
@@ -798,7 +798,7 @@
           <a:p>
             <a:fld id="{EB1FAE4C-5332-014D-8E1B-BB8DA73EF81D}" type="datetimeFigureOut">
               <a:rPr lang="en-US"/>
-              <a:t>4/10/22</a:t>
+              <a:t>5/9/22</a:t>
             </a:fld>
             <a:endParaRPr lang="en-US"/>
           </a:p>
@@ -968,7 +968,7 @@
           <a:p>
             <a:fld id="{EB1FAE4C-5332-014D-8E1B-BB8DA73EF81D}" type="datetimeFigureOut">
               <a:rPr lang="en-US"/>
-              <a:t>4/10/22</a:t>
+              <a:t>5/9/22</a:t>
             </a:fld>
             <a:endParaRPr lang="en-US"/>
           </a:p>
@@ -1148,7 +1148,7 @@
           <a:p>
             <a:fld id="{EB1FAE4C-5332-014D-8E1B-BB8DA73EF81D}" type="datetimeFigureOut">
               <a:rPr lang="en-US"/>
-              <a:t>4/10/22</a:t>
+              <a:t>5/9/22</a:t>
             </a:fld>
             <a:endParaRPr lang="en-US"/>
           </a:p>
@@ -1318,7 +1318,7 @@
           <a:p>
             <a:fld id="{EB1FAE4C-5332-014D-8E1B-BB8DA73EF81D}" type="datetimeFigureOut">
               <a:rPr lang="en-US"/>
-              <a:t>4/10/22</a:t>
+              <a:t>5/9/22</a:t>
             </a:fld>
             <a:endParaRPr lang="en-US"/>
           </a:p>
@@ -1565,7 +1565,7 @@
           <a:p>
             <a:fld id="{EB1FAE4C-5332-014D-8E1B-BB8DA73EF81D}" type="datetimeFigureOut">
               <a:rPr lang="en-US"/>
-              <a:t>4/10/22</a:t>
+              <a:t>5/9/22</a:t>
             </a:fld>
             <a:endParaRPr lang="en-US"/>
           </a:p>
@@ -1796,7 +1796,7 @@
           <a:p>
             <a:fld id="{EB1FAE4C-5332-014D-8E1B-BB8DA73EF81D}" type="datetimeFigureOut">
               <a:rPr lang="en-US"/>
-              <a:t>4/10/22</a:t>
+              <a:t>5/9/22</a:t>
             </a:fld>
             <a:endParaRPr lang="en-US"/>
           </a:p>
@@ -2162,7 +2162,7 @@
           <a:p>
             <a:fld id="{EB1FAE4C-5332-014D-8E1B-BB8DA73EF81D}" type="datetimeFigureOut">
               <a:rPr lang="en-US"/>
-              <a:t>4/10/22</a:t>
+              <a:t>5/9/22</a:t>
             </a:fld>
             <a:endParaRPr lang="en-US"/>
           </a:p>
@@ -2281,7 +2281,7 @@
           <a:p>
             <a:fld id="{EB1FAE4C-5332-014D-8E1B-BB8DA73EF81D}" type="datetimeFigureOut">
               <a:rPr lang="en-US"/>
-              <a:t>4/10/22</a:t>
+              <a:t>5/9/22</a:t>
             </a:fld>
             <a:endParaRPr lang="en-US"/>
           </a:p>
@@ -2378,7 +2378,7 @@
           <a:p>
             <a:fld id="{EB1FAE4C-5332-014D-8E1B-BB8DA73EF81D}" type="datetimeFigureOut">
               <a:rPr lang="en-US"/>
-              <a:t>4/10/22</a:t>
+              <a:t>5/9/22</a:t>
             </a:fld>
             <a:endParaRPr lang="en-US"/>
           </a:p>
@@ -2654,7 +2654,7 @@
           <a:p>
             <a:fld id="{EB1FAE4C-5332-014D-8E1B-BB8DA73EF81D}" type="datetimeFigureOut">
               <a:rPr lang="en-US"/>
-              <a:t>4/10/22</a:t>
+              <a:t>5/9/22</a:t>
             </a:fld>
             <a:endParaRPr lang="en-US"/>
           </a:p>
@@ -2911,7 +2911,7 @@
           <a:p>
             <a:fld id="{EB1FAE4C-5332-014D-8E1B-BB8DA73EF81D}" type="datetimeFigureOut">
               <a:rPr lang="en-US"/>
-              <a:t>4/10/22</a:t>
+              <a:t>5/9/22</a:t>
             </a:fld>
             <a:endParaRPr lang="en-US"/>
           </a:p>
@@ -3124,7 +3124,7 @@
           <a:p>
             <a:fld id="{EB1FAE4C-5332-014D-8E1B-BB8DA73EF81D}" type="datetimeFigureOut">
               <a:rPr lang="en-US"/>
-              <a:t>4/10/22</a:t>
+              <a:t>5/9/22</a:t>
             </a:fld>
             <a:endParaRPr lang="en-US"/>
           </a:p>
@@ -4615,110 +4615,6 @@
         </p:nvSpPr>
         <p:spPr>
           <a:xfrm>
-            <a:off x="0" y="11344"/>
-            <a:ext cx="2764465" cy="523220"/>
-          </a:xfrm>
-          <a:prstGeom prst="rect">
-            <a:avLst/>
-          </a:prstGeom>
-          <a:noFill/>
-        </p:spPr>
-        <p:txBody>
-          <a:bodyPr wrap="square" rtlCol="0">
-            <a:spAutoFit/>
-          </a:bodyPr>
-          <a:lstStyle/>
-          <a:p>
-            <a:r>
-              <a:rPr lang="en-US" sz="2800" b="1"/>
-              <a:t>Crypto Lending</a:t>
-            </a:r>
-          </a:p>
-        </p:txBody>
-      </p:sp>
-      <p:sp>
-        <p:nvSpPr>
-          <p:cNvPr id="3" name="TextBox 2">
-            <a:extLst>
-              <a:ext uri="{FF2B5EF4-FFF2-40B4-BE49-F238E27FC236}">
-                <a16:creationId xmlns:a16="http://schemas.microsoft.com/office/drawing/2014/main" id="{E6FDE75F-9BCD-2A42-B045-8BADB6652072}"/>
-              </a:ext>
-            </a:extLst>
-          </p:cNvPr>
-          <p:cNvSpPr txBox="1"/>
-          <p:nvPr/>
-        </p:nvSpPr>
-        <p:spPr>
-          <a:xfrm>
-            <a:off x="6940062" y="181232"/>
-            <a:ext cx="3751385" cy="307777"/>
-          </a:xfrm>
-          <a:prstGeom prst="rect">
-            <a:avLst/>
-          </a:prstGeom>
-          <a:noFill/>
-        </p:spPr>
-        <p:txBody>
-          <a:bodyPr wrap="square" rtlCol="0">
-            <a:spAutoFit/>
-          </a:bodyPr>
-          <a:lstStyle/>
-          <a:p>
-            <a:r>
-              <a:rPr lang="en-US" sz="1400" b="1">
-                <a:solidFill>
-                  <a:srgbClr val="FF0000"/>
-                </a:solidFill>
-              </a:rPr>
-              <a:t>Page Under Construction</a:t>
-            </a:r>
-          </a:p>
-        </p:txBody>
-      </p:sp>
-    </p:spTree>
-    <p:extLst>
-      <p:ext uri="{BB962C8B-B14F-4D97-AF65-F5344CB8AC3E}">
-        <p14:creationId xmlns:p14="http://schemas.microsoft.com/office/powerpoint/2010/main" val="664642926"/>
-      </p:ext>
-    </p:extLst>
-  </p:cSld>
-  <p:clrMapOvr>
-    <a:masterClrMapping/>
-  </p:clrMapOvr>
-</p:sld>
-</file>
-
-<file path=ppt/slides/slide4.xml><?xml version="1.0" encoding="utf-8"?>
-<p:sld xmlns:a="http://schemas.openxmlformats.org/drawingml/2006/main" xmlns:r="http://schemas.openxmlformats.org/officeDocument/2006/relationships" xmlns:p="http://schemas.openxmlformats.org/presentationml/2006/main">
-  <p:cSld>
-    <p:spTree>
-      <p:nvGrpSpPr>
-        <p:cNvPr id="1" name=""/>
-        <p:cNvGrpSpPr/>
-        <p:nvPr/>
-      </p:nvGrpSpPr>
-      <p:grpSpPr>
-        <a:xfrm>
-          <a:off x="0" y="0"/>
-          <a:ext cx="0" cy="0"/>
-          <a:chOff x="0" y="0"/>
-          <a:chExt cx="0" cy="0"/>
-        </a:xfrm>
-      </p:grpSpPr>
-      <p:sp>
-        <p:nvSpPr>
-          <p:cNvPr id="2" name="TextBox 1">
-            <a:extLst>
-              <a:ext uri="{FF2B5EF4-FFF2-40B4-BE49-F238E27FC236}">
-                <a16:creationId xmlns:a16="http://schemas.microsoft.com/office/drawing/2014/main" id="{67B42EF9-89A4-194B-BB40-DE4CA1888206}"/>
-              </a:ext>
-            </a:extLst>
-          </p:cNvPr>
-          <p:cNvSpPr txBox="1"/>
-          <p:nvPr/>
-        </p:nvSpPr>
-        <p:spPr>
-          <a:xfrm>
             <a:off x="0" y="11345"/>
             <a:ext cx="4537024" cy="523220"/>
           </a:xfrm>
@@ -4858,7 +4754,7 @@
 </p:sld>
 </file>
 
-<file path=ppt/slides/slide5.xml><?xml version="1.0" encoding="utf-8"?>
+<file path=ppt/slides/slide4.xml><?xml version="1.0" encoding="utf-8"?>
 <p:sld xmlns:a="http://schemas.openxmlformats.org/drawingml/2006/main" xmlns:r="http://schemas.openxmlformats.org/officeDocument/2006/relationships" xmlns:p="http://schemas.openxmlformats.org/presentationml/2006/main">
   <p:cSld>
     <p:spTree>
@@ -4924,7 +4820,7 @@
 </p:sld>
 </file>
 
-<file path=ppt/slides/slide6.xml><?xml version="1.0" encoding="utf-8"?>
+<file path=ppt/slides/slide5.xml><?xml version="1.0" encoding="utf-8"?>
 <p:sld xmlns:a="http://schemas.openxmlformats.org/drawingml/2006/main" xmlns:r="http://schemas.openxmlformats.org/officeDocument/2006/relationships" xmlns:p="http://schemas.openxmlformats.org/presentationml/2006/main">
   <p:cSld>
     <p:spTree>
@@ -5206,7 +5102,7 @@
 </p:sld>
 </file>
 
-<file path=ppt/slides/slide7.xml><?xml version="1.0" encoding="utf-8"?>
+<file path=ppt/slides/slide6.xml><?xml version="1.0" encoding="utf-8"?>
 <p:sld xmlns:a="http://schemas.openxmlformats.org/drawingml/2006/main" xmlns:r="http://schemas.openxmlformats.org/officeDocument/2006/relationships" xmlns:p="http://schemas.openxmlformats.org/presentationml/2006/main">
   <p:cSld>
     <p:spTree>
@@ -5467,7 +5363,7 @@
 </p:sld>
 </file>
 
-<file path=ppt/slides/slide8.xml><?xml version="1.0" encoding="utf-8"?>
+<file path=ppt/slides/slide7.xml><?xml version="1.0" encoding="utf-8"?>
 <p:sld xmlns:a="http://schemas.openxmlformats.org/drawingml/2006/main" xmlns:r="http://schemas.openxmlformats.org/officeDocument/2006/relationships" xmlns:p="http://schemas.openxmlformats.org/presentationml/2006/main">
   <p:cSld>
     <p:spTree>
@@ -5867,6 +5763,106 @@
     <p:extLst>
       <p:ext uri="{BB962C8B-B14F-4D97-AF65-F5344CB8AC3E}">
         <p14:creationId xmlns:p14="http://schemas.microsoft.com/office/powerpoint/2010/main" val="709409403"/>
+      </p:ext>
+    </p:extLst>
+  </p:cSld>
+  <p:clrMapOvr>
+    <a:masterClrMapping/>
+  </p:clrMapOvr>
+</p:sld>
+</file>
+
+<file path=ppt/slides/slide8.xml><?xml version="1.0" encoding="utf-8"?>
+<p:sld xmlns:a="http://schemas.openxmlformats.org/drawingml/2006/main" xmlns:r="http://schemas.openxmlformats.org/officeDocument/2006/relationships" xmlns:p="http://schemas.openxmlformats.org/presentationml/2006/main">
+  <p:cSld>
+    <p:spTree>
+      <p:nvGrpSpPr>
+        <p:cNvPr id="1" name=""/>
+        <p:cNvGrpSpPr/>
+        <p:nvPr/>
+      </p:nvGrpSpPr>
+      <p:grpSpPr>
+        <a:xfrm>
+          <a:off x="0" y="0"/>
+          <a:ext cx="0" cy="0"/>
+          <a:chOff x="0" y="0"/>
+          <a:chExt cx="0" cy="0"/>
+        </a:xfrm>
+      </p:grpSpPr>
+      <p:sp>
+        <p:nvSpPr>
+          <p:cNvPr id="2" name="TextBox 1">
+            <a:extLst>
+              <a:ext uri="{FF2B5EF4-FFF2-40B4-BE49-F238E27FC236}">
+                <a16:creationId xmlns:a16="http://schemas.microsoft.com/office/drawing/2014/main" id="{CEADCAE4-C4ED-F567-CE1F-46AF8939A4B5}"/>
+              </a:ext>
+            </a:extLst>
+          </p:cNvPr>
+          <p:cNvSpPr txBox="1"/>
+          <p:nvPr/>
+        </p:nvSpPr>
+        <p:spPr>
+          <a:xfrm>
+            <a:off x="0" y="119921"/>
+            <a:ext cx="4392118" cy="523220"/>
+          </a:xfrm>
+          <a:prstGeom prst="rect">
+            <a:avLst/>
+          </a:prstGeom>
+          <a:noFill/>
+        </p:spPr>
+        <p:txBody>
+          <a:bodyPr wrap="square" rtlCol="0">
+            <a:spAutoFit/>
+          </a:bodyPr>
+          <a:lstStyle/>
+          <a:p>
+            <a:r>
+              <a:rPr lang="en-US" sz="2800" b="1"/>
+              <a:t>Decentralized Social Media</a:t>
+            </a:r>
+          </a:p>
+        </p:txBody>
+      </p:sp>
+      <p:sp>
+        <p:nvSpPr>
+          <p:cNvPr id="3" name="TextBox 2">
+            <a:extLst>
+              <a:ext uri="{FF2B5EF4-FFF2-40B4-BE49-F238E27FC236}">
+                <a16:creationId xmlns:a16="http://schemas.microsoft.com/office/drawing/2014/main" id="{4FEDEDCA-65A9-2F1C-279C-CDCE9CFB090C}"/>
+              </a:ext>
+            </a:extLst>
+          </p:cNvPr>
+          <p:cNvSpPr txBox="1"/>
+          <p:nvPr/>
+        </p:nvSpPr>
+        <p:spPr>
+          <a:xfrm>
+            <a:off x="2398426" y="2953062"/>
+            <a:ext cx="5861154" cy="369332"/>
+          </a:xfrm>
+          <a:prstGeom prst="rect">
+            <a:avLst/>
+          </a:prstGeom>
+          <a:noFill/>
+        </p:spPr>
+        <p:txBody>
+          <a:bodyPr wrap="square" rtlCol="0">
+            <a:spAutoFit/>
+          </a:bodyPr>
+          <a:lstStyle/>
+          <a:p>
+            <a:r>
+              <a:rPr lang="en-US"/>
+              <a:t>Decentralized Social Media</a:t>
+            </a:r>
+          </a:p>
+        </p:txBody>
+      </p:sp>
+    </p:spTree>
+    <p:extLst>
+      <p:ext uri="{BB962C8B-B14F-4D97-AF65-F5344CB8AC3E}">
+        <p14:creationId xmlns:p14="http://schemas.microsoft.com/office/powerpoint/2010/main" val="1380567137"/>
       </p:ext>
     </p:extLst>
   </p:cSld>
